--- a/2026-T4/ICTSAD507-Design_ImplQA_processes/task2/2-Presentation.pptx
+++ b/2026-T4/ICTSAD507-Design_ImplQA_processes/task2/2-Presentation.pptx
@@ -121,6 +121,11 @@
       </a:defRPr>
     </a:lvl9pPr>
   </p:defaultTextStyle>
+  <p:extLst>
+    <p:ext uri="{EFAFB233-063F-42B5-8137-9DF3F51BA10A}">
+      <p15:sldGuideLst xmlns:p15="http://schemas.microsoft.com/office/powerpoint/2012/main"/>
+    </p:ext>
+  </p:extLst>
 </p:presentation>
 </file>
 
@@ -206,7 +211,7 @@
           <a:p>
             <a:fld id="{A2A45CFF-950A-4041-8C74-DADB5D97DAF6}" type="datetimeFigureOut">
               <a:rPr lang="en-AU" smtClean="0"/>
-              <a:t>15/10/2026</a:t>
+              <a:t>17/10/2026</a:t>
             </a:fld>
             <a:endParaRPr lang="en-AU"/>
           </a:p>
@@ -2077,7 +2082,7 @@
           <a:p>
             <a:fld id="{B3F85AFC-B25C-9A42-9D1F-183747EA9F71}" type="datetimeFigureOut">
               <a:rPr lang="en-AU" smtClean="0"/>
-              <a:t>15/10/2026</a:t>
+              <a:t>17/10/2026</a:t>
             </a:fld>
             <a:endParaRPr lang="en-AU"/>
           </a:p>
@@ -2397,7 +2402,7 @@
           <a:p>
             <a:fld id="{B3F85AFC-B25C-9A42-9D1F-183747EA9F71}" type="datetimeFigureOut">
               <a:rPr lang="en-AU" smtClean="0"/>
-              <a:t>15/10/2026</a:t>
+              <a:t>17/10/2026</a:t>
             </a:fld>
             <a:endParaRPr lang="en-AU"/>
           </a:p>
@@ -2645,7 +2650,7 @@
           <a:p>
             <a:fld id="{B3F85AFC-B25C-9A42-9D1F-183747EA9F71}" type="datetimeFigureOut">
               <a:rPr lang="en-AU" smtClean="0"/>
-              <a:t>15/10/2026</a:t>
+              <a:t>17/10/2026</a:t>
             </a:fld>
             <a:endParaRPr lang="en-AU"/>
           </a:p>
@@ -2984,7 +2989,7 @@
           <a:p>
             <a:fld id="{B3F85AFC-B25C-9A42-9D1F-183747EA9F71}" type="datetimeFigureOut">
               <a:rPr lang="en-AU" smtClean="0"/>
-              <a:t>15/10/2026</a:t>
+              <a:t>17/10/2026</a:t>
             </a:fld>
             <a:endParaRPr lang="en-AU"/>
           </a:p>
@@ -3331,7 +3336,7 @@
           <a:p>
             <a:fld id="{B3F85AFC-B25C-9A42-9D1F-183747EA9F71}" type="datetimeFigureOut">
               <a:rPr lang="en-AU" smtClean="0"/>
-              <a:t>15/10/2026</a:t>
+              <a:t>17/10/2026</a:t>
             </a:fld>
             <a:endParaRPr lang="en-AU"/>
           </a:p>
@@ -3705,7 +3710,7 @@
           <a:p>
             <a:fld id="{B3F85AFC-B25C-9A42-9D1F-183747EA9F71}" type="datetimeFigureOut">
               <a:rPr lang="en-AU" smtClean="0"/>
-              <a:t>15/10/2026</a:t>
+              <a:t>17/10/2026</a:t>
             </a:fld>
             <a:endParaRPr lang="en-AU"/>
           </a:p>
@@ -4175,7 +4180,7 @@
           <a:p>
             <a:fld id="{B3F85AFC-B25C-9A42-9D1F-183747EA9F71}" type="datetimeFigureOut">
               <a:rPr lang="en-AU" smtClean="0"/>
-              <a:t>15/10/2026</a:t>
+              <a:t>17/10/2026</a:t>
             </a:fld>
             <a:endParaRPr lang="en-AU"/>
           </a:p>
@@ -4380,7 +4385,7 @@
           <a:p>
             <a:fld id="{B3F85AFC-B25C-9A42-9D1F-183747EA9F71}" type="datetimeFigureOut">
               <a:rPr lang="en-AU" smtClean="0"/>
-              <a:t>15/10/2026</a:t>
+              <a:t>17/10/2026</a:t>
             </a:fld>
             <a:endParaRPr lang="en-AU"/>
           </a:p>
@@ -4591,7 +4596,7 @@
           <a:p>
             <a:fld id="{B3F85AFC-B25C-9A42-9D1F-183747EA9F71}" type="datetimeFigureOut">
               <a:rPr lang="en-AU" smtClean="0"/>
-              <a:t>15/10/2026</a:t>
+              <a:t>17/10/2026</a:t>
             </a:fld>
             <a:endParaRPr lang="en-AU"/>
           </a:p>
@@ -4914,7 +4919,7 @@
           </a:prstGeom>
           <a:extLst>
             <a:ext uri="{C572A759-6A51-4108-AA02-DFA0A04FC94B}">
-              <ma14:wrappingTextBoxFlag xmlns:ma14="http://schemas.microsoft.com/office/mac/drawingml/2011/main" xmlns="" val="0"/>
+              <ma14:wrappingTextBoxFlag xmlns="" xmlns:ma14="http://schemas.microsoft.com/office/mac/drawingml/2011/main" val="0"/>
             </a:ext>
           </a:extLst>
         </p:spPr>
@@ -5092,7 +5097,7 @@
           <a:p>
             <a:fld id="{B3F85AFC-B25C-9A42-9D1F-183747EA9F71}" type="datetimeFigureOut">
               <a:rPr lang="en-AU" smtClean="0"/>
-              <a:t>15/10/2026</a:t>
+              <a:t>17/10/2026</a:t>
             </a:fld>
             <a:endParaRPr lang="en-AU"/>
           </a:p>
@@ -5231,7 +5236,7 @@
           </a:prstGeom>
           <a:extLst>
             <a:ext uri="{C572A759-6A51-4108-AA02-DFA0A04FC94B}">
-              <ma14:wrappingTextBoxFlag xmlns:ma14="http://schemas.microsoft.com/office/mac/drawingml/2011/main" xmlns="" val="0"/>
+              <ma14:wrappingTextBoxFlag xmlns="" xmlns:ma14="http://schemas.microsoft.com/office/mac/drawingml/2011/main" val="0"/>
             </a:ext>
           </a:extLst>
         </p:spPr>
@@ -5456,7 +5461,7 @@
           <a:p>
             <a:fld id="{B3F85AFC-B25C-9A42-9D1F-183747EA9F71}" type="datetimeFigureOut">
               <a:rPr lang="en-AU" smtClean="0"/>
-              <a:t>15/10/2026</a:t>
+              <a:t>17/10/2026</a:t>
             </a:fld>
             <a:endParaRPr lang="en-AU"/>
           </a:p>
@@ -5754,7 +5759,7 @@
           <a:p>
             <a:fld id="{B3F85AFC-B25C-9A42-9D1F-183747EA9F71}" type="datetimeFigureOut">
               <a:rPr lang="en-AU" smtClean="0"/>
-              <a:t>15/10/2026</a:t>
+              <a:t>17/10/2026</a:t>
             </a:fld>
             <a:endParaRPr lang="en-AU"/>
           </a:p>
@@ -6148,7 +6153,7 @@
           <a:p>
             <a:fld id="{B3F85AFC-B25C-9A42-9D1F-183747EA9F71}" type="datetimeFigureOut">
               <a:rPr lang="en-AU" smtClean="0"/>
-              <a:t>15/10/2026</a:t>
+              <a:t>17/10/2026</a:t>
             </a:fld>
             <a:endParaRPr lang="en-AU"/>
           </a:p>
@@ -6297,7 +6302,7 @@
           <a:p>
             <a:fld id="{B3F85AFC-B25C-9A42-9D1F-183747EA9F71}" type="datetimeFigureOut">
               <a:rPr lang="en-AU" smtClean="0"/>
-              <a:t>15/10/2026</a:t>
+              <a:t>17/10/2026</a:t>
             </a:fld>
             <a:endParaRPr lang="en-AU"/>
           </a:p>
@@ -6423,7 +6428,7 @@
           <a:p>
             <a:fld id="{B3F85AFC-B25C-9A42-9D1F-183747EA9F71}" type="datetimeFigureOut">
               <a:rPr lang="en-AU" smtClean="0"/>
-              <a:t>15/10/2026</a:t>
+              <a:t>17/10/2026</a:t>
             </a:fld>
             <a:endParaRPr lang="en-AU"/>
           </a:p>
@@ -6678,7 +6683,7 @@
           <a:p>
             <a:fld id="{B3F85AFC-B25C-9A42-9D1F-183747EA9F71}" type="datetimeFigureOut">
               <a:rPr lang="en-AU" smtClean="0"/>
-              <a:t>15/10/2026</a:t>
+              <a:t>17/10/2026</a:t>
             </a:fld>
             <a:endParaRPr lang="en-AU"/>
           </a:p>
@@ -6989,7 +6994,7 @@
           <a:p>
             <a:fld id="{B3F85AFC-B25C-9A42-9D1F-183747EA9F71}" type="datetimeFigureOut">
               <a:rPr lang="en-AU" smtClean="0"/>
-              <a:t>15/10/2026</a:t>
+              <a:t>17/10/2026</a:t>
             </a:fld>
             <a:endParaRPr lang="en-AU"/>
           </a:p>
@@ -7340,7 +7345,7 @@
           <a:p>
             <a:fld id="{B3F85AFC-B25C-9A42-9D1F-183747EA9F71}" type="datetimeFigureOut">
               <a:rPr lang="en-AU" smtClean="0"/>
-              <a:t>15/10/2026</a:t>
+              <a:t>17/10/2026</a:t>
             </a:fld>
             <a:endParaRPr lang="en-AU"/>
           </a:p>
@@ -8384,7 +8389,7 @@
           </a:prstGeom>
           <a:extLst>
             <a:ext uri="{C572A759-6A51-4108-AA02-DFA0A04FC94B}">
-              <ma14:wrappingTextBoxFlag xmlns:ma14="http://schemas.microsoft.com/office/mac/drawingml/2011/main" xmlns="" val="0"/>
+              <ma14:wrappingTextBoxFlag xmlns="" xmlns:ma14="http://schemas.microsoft.com/office/mac/drawingml/2011/main" val="0"/>
             </a:ext>
           </a:extLst>
         </p:spPr>
@@ -8576,7 +8581,7 @@
           </a:prstGeom>
           <a:extLst>
             <a:ext uri="{C572A759-6A51-4108-AA02-DFA0A04FC94B}">
-              <ma14:wrappingTextBoxFlag xmlns:ma14="http://schemas.microsoft.com/office/mac/drawingml/2011/main" xmlns="" val="0"/>
+              <ma14:wrappingTextBoxFlag xmlns="" xmlns:ma14="http://schemas.microsoft.com/office/mac/drawingml/2011/main" val="0"/>
             </a:ext>
           </a:extLst>
         </p:spPr>
@@ -9295,7 +9300,7 @@
           </a:prstGeom>
           <a:extLst>
             <a:ext uri="{C572A759-6A51-4108-AA02-DFA0A04FC94B}">
-              <ma14:wrappingTextBoxFlag xmlns:ma14="http://schemas.microsoft.com/office/mac/drawingml/2011/main" xmlns="" val="0"/>
+              <ma14:wrappingTextBoxFlag xmlns="" xmlns:ma14="http://schemas.microsoft.com/office/mac/drawingml/2011/main" val="0"/>
             </a:ext>
           </a:extLst>
         </p:spPr>
@@ -10295,6 +10300,10 @@
           </p:nvPr>
         </p:nvSpPr>
         <p:spPr>
+          <a:xfrm>
+            <a:off x="548640" y="1463040"/>
+            <a:ext cx="11064240" cy="4108027"/>
+          </a:xfrm>
           <a:prstGeom prst="rect">
             <a:avLst/>
           </a:prstGeom>
@@ -10302,230 +10311,56 @@
           <a:ln/>
         </p:spPr>
         <p:txBody>
-          <a:bodyPr wrap="square" rtlCol="0" anchor="t"/>
+          <a:bodyPr wrap="square" rtlCol="0" anchor="t">
+            <a:normAutofit/>
+          </a:bodyPr>
           <a:lstStyle/>
           <a:p>
-            <a:pPr marL="342900" indent="-342900" algn="l">
-              <a:spcAft>
-                <a:spcPts val="1000"/>
-              </a:spcAft>
-              <a:buSzPct val="100000"/>
+            <a:pPr marL="342900" indent="-342900">
               <a:buFont typeface="+mj-lt"/>
               <a:buAutoNum type="arabicPeriod"/>
             </a:pPr>
             <a:r>
-              <a:rPr lang="en-US" sz="1800" dirty="0">
-                <a:solidFill>
-                  <a:schemeClr val="tx1"/>
-                </a:solidFill>
-              </a:rPr>
-              <a:t>What </a:t>
-            </a:r>
-            <a:r>
-              <a:rPr lang="en-US" sz="1800" b="1" dirty="0">
-                <a:solidFill>
-                  <a:schemeClr val="tx1"/>
-                </a:solidFill>
-              </a:rPr>
-              <a:t>experience</a:t>
-            </a:r>
-            <a:r>
-              <a:rPr lang="en-US" sz="1800" dirty="0">
-                <a:solidFill>
-                  <a:schemeClr val="tx1"/>
-                </a:solidFill>
-              </a:rPr>
-              <a:t> do you have in testing websites, such as online enrolment forms, responsive design on mobile devices and links between systems, and where would you need training?</a:t>
-            </a:r>
-            <a:endParaRPr lang="en-US" sz="1800" dirty="0"/>
-          </a:p>
-          <a:p>
-            <a:pPr marL="342900" indent="-342900" algn="l">
-              <a:spcAft>
-                <a:spcPts val="1000"/>
-              </a:spcAft>
-              <a:buSzPct val="100000"/>
+              <a:rPr lang="en-AU" sz="2400" dirty="0"/>
+              <a:t>Which quality-related roles and key tasks can you competently perform on the project?</a:t>
+            </a:r>
+          </a:p>
+          <a:p>
+            <a:pPr marL="342900" indent="-342900">
               <a:buFont typeface="+mj-lt"/>
               <a:buAutoNum type="arabicPeriod"/>
             </a:pPr>
             <a:r>
-              <a:rPr lang="en-US" sz="1800" dirty="0">
-                <a:solidFill>
-                  <a:schemeClr val="tx1"/>
-                </a:solidFill>
-              </a:rPr>
-              <a:t>How </a:t>
-            </a:r>
-            <a:r>
-              <a:rPr lang="en-US" sz="1800" b="1" dirty="0">
-                <a:solidFill>
-                  <a:schemeClr val="tx1"/>
-                </a:solidFill>
-              </a:rPr>
-              <a:t>confident</a:t>
-            </a:r>
-            <a:r>
-              <a:rPr lang="en-US" sz="1800" dirty="0">
-                <a:solidFill>
-                  <a:schemeClr val="tx1"/>
-                </a:solidFill>
-              </a:rPr>
-              <a:t> are you in recording issues and test </a:t>
-            </a:r>
-            <a:r>
-              <a:rPr lang="en-US" sz="1800" b="1" dirty="0">
-                <a:solidFill>
-                  <a:schemeClr val="tx1"/>
-                </a:solidFill>
-              </a:rPr>
-              <a:t>results</a:t>
-            </a:r>
-            <a:r>
-              <a:rPr lang="en-US" sz="1800" dirty="0">
-                <a:solidFill>
-                  <a:schemeClr val="tx1"/>
-                </a:solidFill>
-              </a:rPr>
-              <a:t> in the project issues register so another team member can follow them up?</a:t>
-            </a:r>
-            <a:endParaRPr lang="en-US" sz="1800" dirty="0"/>
-          </a:p>
-          <a:p>
-            <a:pPr marL="342900" indent="-342900" algn="l">
-              <a:spcAft>
-                <a:spcPts val="1000"/>
-              </a:spcAft>
-              <a:buSzPct val="100000"/>
+              <a:rPr lang="en-AU" sz="2400" dirty="0"/>
+              <a:t>Are you able to cover each of the following areas of interest?</a:t>
+            </a:r>
+          </a:p>
+          <a:p>
+            <a:pPr marL="342900" indent="-342900">
               <a:buFont typeface="+mj-lt"/>
               <a:buAutoNum type="arabicPeriod"/>
             </a:pPr>
             <a:r>
-              <a:rPr lang="en-US" sz="1800" dirty="0">
-                <a:solidFill>
-                  <a:schemeClr val="tx1"/>
-                </a:solidFill>
-              </a:rPr>
-              <a:t>What </a:t>
-            </a:r>
-            <a:r>
-              <a:rPr lang="en-US" sz="1800" b="1" dirty="0">
-                <a:solidFill>
-                  <a:schemeClr val="tx1"/>
-                </a:solidFill>
-              </a:rPr>
-              <a:t>experience</a:t>
-            </a:r>
-            <a:r>
-              <a:rPr lang="en-US" sz="1800" dirty="0">
-                <a:solidFill>
-                  <a:schemeClr val="tx1"/>
-                </a:solidFill>
-              </a:rPr>
-              <a:t> do you have in </a:t>
-            </a:r>
-            <a:r>
-              <a:rPr lang="en-US" sz="1800" b="1" dirty="0">
-                <a:solidFill>
-                  <a:schemeClr val="tx1"/>
-                </a:solidFill>
-              </a:rPr>
-              <a:t>communicating</a:t>
-            </a:r>
-            <a:r>
-              <a:rPr lang="en-US" sz="1800" dirty="0">
-                <a:solidFill>
-                  <a:schemeClr val="tx1"/>
-                </a:solidFill>
-              </a:rPr>
-              <a:t> with and following up an external web developer when timelines are at risk?</a:t>
-            </a:r>
-            <a:endParaRPr lang="en-US" sz="1800" dirty="0"/>
-          </a:p>
-          <a:p>
-            <a:pPr marL="342900" indent="-342900" algn="l">
-              <a:spcAft>
-                <a:spcPts val="1000"/>
-              </a:spcAft>
-              <a:buSzPct val="100000"/>
+              <a:rPr lang="en-AU" sz="2400" dirty="0"/>
+              <a:t>Are there any skills or knowledge gaps that could affect? training, support or specialist expertise required? </a:t>
+            </a:r>
+          </a:p>
+          <a:p>
+            <a:pPr marL="342900" indent="-342900">
               <a:buFont typeface="+mj-lt"/>
               <a:buAutoNum type="arabicPeriod"/>
             </a:pPr>
             <a:r>
-              <a:rPr lang="en-US" sz="1800" dirty="0">
-                <a:solidFill>
-                  <a:schemeClr val="tx1"/>
-                </a:solidFill>
-              </a:rPr>
-              <a:t>Would you be able to </a:t>
-            </a:r>
-            <a:r>
-              <a:rPr lang="en-US" sz="1800" b="1" dirty="0">
-                <a:solidFill>
-                  <a:schemeClr val="tx1"/>
-                </a:solidFill>
-              </a:rPr>
-              <a:t>maintain</a:t>
-            </a:r>
-            <a:r>
-              <a:rPr lang="en-US" sz="1800" dirty="0">
-                <a:solidFill>
-                  <a:schemeClr val="tx1"/>
-                </a:solidFill>
-              </a:rPr>
-              <a:t> and </a:t>
-            </a:r>
-            <a:r>
-              <a:rPr lang="en-US" sz="1800" b="1" dirty="0">
-                <a:solidFill>
-                  <a:schemeClr val="tx1"/>
-                </a:solidFill>
-              </a:rPr>
-              <a:t>update</a:t>
-            </a:r>
-            <a:r>
-              <a:rPr lang="en-US" sz="1800" dirty="0">
-                <a:solidFill>
-                  <a:schemeClr val="tx1"/>
-                </a:solidFill>
-              </a:rPr>
-              <a:t> the website after go-live, or would you need training?</a:t>
-            </a:r>
-            <a:endParaRPr lang="en-US" sz="1800" dirty="0"/>
-          </a:p>
-          <a:p>
-            <a:pPr marL="342900" indent="-342900" algn="l">
-              <a:spcAft>
-                <a:spcPts val="1000"/>
-              </a:spcAft>
-              <a:buSzPct val="100000"/>
+              <a:rPr lang="en-AU" sz="2400"/>
+              <a:t>Do you identify with the standards required to ensure that quality objectives are met?</a:t>
+            </a:r>
+          </a:p>
+          <a:p>
+            <a:pPr marL="342900" indent="-342900">
               <a:buFont typeface="+mj-lt"/>
               <a:buAutoNum type="arabicPeriod"/>
             </a:pPr>
-            <a:r>
-              <a:rPr lang="en-US" sz="1800" dirty="0">
-                <a:solidFill>
-                  <a:schemeClr val="tx1"/>
-                </a:solidFill>
-              </a:rPr>
-              <a:t>How familiar are you with </a:t>
-            </a:r>
-            <a:r>
-              <a:rPr lang="en-US" sz="1800" b="1" dirty="0">
-                <a:solidFill>
-                  <a:schemeClr val="tx1"/>
-                </a:solidFill>
-              </a:rPr>
-              <a:t>privacy requirements </a:t>
-            </a:r>
-            <a:r>
-              <a:rPr lang="en-US" sz="1800" dirty="0">
-                <a:solidFill>
-                  <a:schemeClr val="tx1"/>
-                </a:solidFill>
-              </a:rPr>
-              <a:t>when handling student information in the website and accounting system?</a:t>
-            </a:r>
-            <a:endParaRPr lang="en-US" sz="1800" dirty="0"/>
+            <a:endParaRPr lang="en-AU" sz="2400" dirty="0"/>
           </a:p>
         </p:txBody>
       </p:sp>
@@ -10549,7 +10384,7 @@
           </a:prstGeom>
           <a:extLst>
             <a:ext uri="{C572A759-6A51-4108-AA02-DFA0A04FC94B}">
-              <ma14:wrappingTextBoxFlag xmlns:ma14="http://schemas.microsoft.com/office/mac/drawingml/2011/main" xmlns="" val="0"/>
+              <ma14:wrappingTextBoxFlag xmlns="" xmlns:ma14="http://schemas.microsoft.com/office/mac/drawingml/2011/main" val="0"/>
             </a:ext>
           </a:extLst>
         </p:spPr>
@@ -10574,38 +10409,6 @@
           </a:p>
         </p:txBody>
       </p:sp>
-      <p:pic>
-        <p:nvPicPr>
-          <p:cNvPr id="4" name="Picture 3" descr="Lupa logo Vectors - Download Free High-Quality Vectors | Magnific (formerly  Freepik)">
-            <a:extLst>
-              <a:ext uri="{FF2B5EF4-FFF2-40B4-BE49-F238E27FC236}">
-                <a16:creationId xmlns:a16="http://schemas.microsoft.com/office/drawing/2014/main" id="{CEFA940F-C03D-6585-4CF4-3C6393010978}"/>
-              </a:ext>
-            </a:extLst>
-          </p:cNvPr>
-          <p:cNvPicPr>
-            <a:picLocks noChangeAspect="1"/>
-          </p:cNvPicPr>
-          <p:nvPr/>
-        </p:nvPicPr>
-        <p:blipFill>
-          <a:blip r:embed="rId3">
-            <a:alphaModFix amt="21000"/>
-          </a:blip>
-          <a:stretch>
-            <a:fillRect/>
-          </a:stretch>
-        </p:blipFill>
-        <p:spPr>
-          <a:xfrm>
-            <a:off x="3263900" y="1079500"/>
-            <a:ext cx="5187950" cy="5187950"/>
-          </a:xfrm>
-          <a:prstGeom prst="rect">
-            <a:avLst/>
-          </a:prstGeom>
-        </p:spPr>
-      </p:pic>
     </p:spTree>
   </p:cSld>
   <p:clrMapOvr>
@@ -10811,7 +10614,7 @@
           </a:prstGeom>
           <a:extLst>
             <a:ext uri="{C572A759-6A51-4108-AA02-DFA0A04FC94B}">
-              <ma14:wrappingTextBoxFlag xmlns:ma14="http://schemas.microsoft.com/office/mac/drawingml/2011/main" xmlns="" val="0"/>
+              <ma14:wrappingTextBoxFlag xmlns="" xmlns:ma14="http://schemas.microsoft.com/office/mac/drawingml/2011/main" val="0"/>
             </a:ext>
           </a:extLst>
         </p:spPr>
@@ -11174,7 +10977,7 @@
           </a:prstGeom>
           <a:extLst>
             <a:ext uri="{C572A759-6A51-4108-AA02-DFA0A04FC94B}">
-              <ma14:wrappingTextBoxFlag xmlns:ma14="http://schemas.microsoft.com/office/mac/drawingml/2011/main" xmlns="" val="0"/>
+              <ma14:wrappingTextBoxFlag xmlns="" xmlns:ma14="http://schemas.microsoft.com/office/mac/drawingml/2011/main" val="0"/>
             </a:ext>
           </a:extLst>
         </p:spPr>
@@ -11342,7 +11145,7 @@
           </a:prstGeom>
           <a:extLst>
             <a:ext uri="{C572A759-6A51-4108-AA02-DFA0A04FC94B}">
-              <ma14:wrappingTextBoxFlag xmlns:ma14="http://schemas.microsoft.com/office/mac/drawingml/2011/main" xmlns="" val="0"/>
+              <ma14:wrappingTextBoxFlag xmlns="" xmlns:ma14="http://schemas.microsoft.com/office/mac/drawingml/2011/main" val="0"/>
             </a:ext>
           </a:extLst>
         </p:spPr>
@@ -12410,7 +12213,7 @@
           </a:prstGeom>
           <a:extLst>
             <a:ext uri="{C572A759-6A51-4108-AA02-DFA0A04FC94B}">
-              <ma14:wrappingTextBoxFlag xmlns:ma14="http://schemas.microsoft.com/office/mac/drawingml/2011/main" xmlns="" val="0"/>
+              <ma14:wrappingTextBoxFlag xmlns="" xmlns:ma14="http://schemas.microsoft.com/office/mac/drawingml/2011/main" val="0"/>
             </a:ext>
           </a:extLst>
         </p:spPr>
@@ -12642,7 +12445,7 @@
           </a:prstGeom>
           <a:extLst>
             <a:ext uri="{C572A759-6A51-4108-AA02-DFA0A04FC94B}">
-              <ma14:wrappingTextBoxFlag xmlns="" xmlns:ma14="http://schemas.microsoft.com/office/mac/drawingml/2011/main" val="0"/>
+              <ma14:wrappingTextBoxFlag xmlns:ma14="http://schemas.microsoft.com/office/mac/drawingml/2011/main" xmlns="" val="0"/>
             </a:ext>
           </a:extLst>
         </p:spPr>
@@ -12880,7 +12683,7 @@
           </a:prstGeom>
           <a:extLst>
             <a:ext uri="{C572A759-6A51-4108-AA02-DFA0A04FC94B}">
-              <ma14:wrappingTextBoxFlag xmlns:ma14="http://schemas.microsoft.com/office/mac/drawingml/2011/main" xmlns="" val="0"/>
+              <ma14:wrappingTextBoxFlag xmlns="" xmlns:ma14="http://schemas.microsoft.com/office/mac/drawingml/2011/main" val="0"/>
             </a:ext>
           </a:extLst>
         </p:spPr>
@@ -13119,7 +12922,7 @@
           </a:prstGeom>
           <a:extLst>
             <a:ext uri="{C572A759-6A51-4108-AA02-DFA0A04FC94B}">
-              <ma14:wrappingTextBoxFlag xmlns="" xmlns:ma14="http://schemas.microsoft.com/office/mac/drawingml/2011/main" val="0"/>
+              <ma14:wrappingTextBoxFlag xmlns:ma14="http://schemas.microsoft.com/office/mac/drawingml/2011/main" xmlns="" val="0"/>
             </a:ext>
           </a:extLst>
         </p:spPr>
@@ -13494,7 +13297,7 @@
           </a:prstGeom>
           <a:extLst>
             <a:ext uri="{C572A759-6A51-4108-AA02-DFA0A04FC94B}">
-              <ma14:wrappingTextBoxFlag xmlns:ma14="http://schemas.microsoft.com/office/mac/drawingml/2011/main" xmlns="" val="0"/>
+              <ma14:wrappingTextBoxFlag xmlns="" xmlns:ma14="http://schemas.microsoft.com/office/mac/drawingml/2011/main" val="0"/>
             </a:ext>
           </a:extLst>
         </p:spPr>
@@ -13842,7 +13645,7 @@
           </a:prstGeom>
           <a:extLst>
             <a:ext uri="{C572A759-6A51-4108-AA02-DFA0A04FC94B}">
-              <ma14:wrappingTextBoxFlag xmlns:ma14="http://schemas.microsoft.com/office/mac/drawingml/2011/main" xmlns="" val="0"/>
+              <ma14:wrappingTextBoxFlag xmlns="" xmlns:ma14="http://schemas.microsoft.com/office/mac/drawingml/2011/main" val="0"/>
             </a:ext>
           </a:extLst>
         </p:spPr>

--- a/2026-T4/ICTSAD507-Design_ImplQA_processes/task2/2-Presentation.pptx
+++ b/2026-T4/ICTSAD507-Design_ImplQA_processes/task2/2-Presentation.pptx
@@ -4919,7 +4919,7 @@
           </a:prstGeom>
           <a:extLst>
             <a:ext uri="{C572A759-6A51-4108-AA02-DFA0A04FC94B}">
-              <ma14:wrappingTextBoxFlag xmlns="" xmlns:ma14="http://schemas.microsoft.com/office/mac/drawingml/2011/main" val="0"/>
+              <ma14:wrappingTextBoxFlag xmlns:ma14="http://schemas.microsoft.com/office/mac/drawingml/2011/main" xmlns="" val="0"/>
             </a:ext>
           </a:extLst>
         </p:spPr>
@@ -5236,7 +5236,7 @@
           </a:prstGeom>
           <a:extLst>
             <a:ext uri="{C572A759-6A51-4108-AA02-DFA0A04FC94B}">
-              <ma14:wrappingTextBoxFlag xmlns="" xmlns:ma14="http://schemas.microsoft.com/office/mac/drawingml/2011/main" val="0"/>
+              <ma14:wrappingTextBoxFlag xmlns:ma14="http://schemas.microsoft.com/office/mac/drawingml/2011/main" xmlns="" val="0"/>
             </a:ext>
           </a:extLst>
         </p:spPr>
@@ -7904,7 +7904,7 @@
         <p:spPr>
           <a:xfrm>
             <a:off x="731520" y="1188720"/>
-            <a:ext cx="10698480" cy="1828800"/>
+            <a:ext cx="10698480" cy="2573052"/>
           </a:xfrm>
           <a:prstGeom prst="rect">
             <a:avLst/>
@@ -7920,7 +7920,14 @@
               <a:rPr lang="en-US" dirty="0"/>
               <a:t>New Website Quality Management Plan</a:t>
             </a:r>
-            <a:endParaRPr lang="en-US" sz="3600" dirty="0"/>
+            <a:br>
+              <a:rPr lang="en-US" dirty="0"/>
+            </a:br>
+            <a:r>
+              <a:rPr lang="en-US" sz="1400" b="0" dirty="0"/>
+              <a:t>Based on QA_planning-and-developmentV1</a:t>
+            </a:r>
+            <a:endParaRPr lang="en-US" sz="1600" b="0" dirty="0"/>
           </a:p>
         </p:txBody>
       </p:sp>
@@ -8059,7 +8066,7 @@
         <p:spPr>
           <a:xfrm>
             <a:off x="7895250" y="5748774"/>
-            <a:ext cx="3852465" cy="369332"/>
+            <a:ext cx="3967881" cy="369332"/>
           </a:xfrm>
           <a:prstGeom prst="rect">
             <a:avLst/>
@@ -8074,7 +8081,7 @@
           <a:p>
             <a:r>
               <a:rPr lang="en-AU" dirty="0"/>
-              <a:t>Milestones IC | Advance Diploma of IT</a:t>
+              <a:t>Milestones IC | Advanced Diploma of IT</a:t>
             </a:r>
           </a:p>
         </p:txBody>
@@ -8389,7 +8396,7 @@
           </a:prstGeom>
           <a:extLst>
             <a:ext uri="{C572A759-6A51-4108-AA02-DFA0A04FC94B}">
-              <ma14:wrappingTextBoxFlag xmlns="" xmlns:ma14="http://schemas.microsoft.com/office/mac/drawingml/2011/main" val="0"/>
+              <ma14:wrappingTextBoxFlag xmlns:ma14="http://schemas.microsoft.com/office/mac/drawingml/2011/main" xmlns="" val="0"/>
             </a:ext>
           </a:extLst>
         </p:spPr>
@@ -8581,7 +8588,7 @@
           </a:prstGeom>
           <a:extLst>
             <a:ext uri="{C572A759-6A51-4108-AA02-DFA0A04FC94B}">
-              <ma14:wrappingTextBoxFlag xmlns="" xmlns:ma14="http://schemas.microsoft.com/office/mac/drawingml/2011/main" val="0"/>
+              <ma14:wrappingTextBoxFlag xmlns:ma14="http://schemas.microsoft.com/office/mac/drawingml/2011/main" xmlns="" val="0"/>
             </a:ext>
           </a:extLst>
         </p:spPr>
@@ -9300,7 +9307,7 @@
           </a:prstGeom>
           <a:extLst>
             <a:ext uri="{C572A759-6A51-4108-AA02-DFA0A04FC94B}">
-              <ma14:wrappingTextBoxFlag xmlns="" xmlns:ma14="http://schemas.microsoft.com/office/mac/drawingml/2011/main" val="0"/>
+              <ma14:wrappingTextBoxFlag xmlns:ma14="http://schemas.microsoft.com/office/mac/drawingml/2011/main" xmlns="" val="0"/>
             </a:ext>
           </a:extLst>
         </p:spPr>
@@ -10253,6 +10260,38 @@
           <a:chExt cx="0" cy="0"/>
         </a:xfrm>
       </p:grpSpPr>
+      <p:pic>
+        <p:nvPicPr>
+          <p:cNvPr id="4" name="Picture 3" descr="Lupa logo Vectors - Download Free High-Quality Vectors | Magnific (formerly  Freepik)">
+            <a:extLst>
+              <a:ext uri="{FF2B5EF4-FFF2-40B4-BE49-F238E27FC236}">
+                <a16:creationId xmlns:a16="http://schemas.microsoft.com/office/drawing/2014/main" id="{C056A4EA-1044-A774-7962-206E185F2880}"/>
+              </a:ext>
+            </a:extLst>
+          </p:cNvPr>
+          <p:cNvPicPr>
+            <a:picLocks noChangeAspect="1"/>
+          </p:cNvPicPr>
+          <p:nvPr/>
+        </p:nvPicPr>
+        <p:blipFill>
+          <a:blip r:embed="rId3">
+            <a:alphaModFix amt="20000"/>
+          </a:blip>
+          <a:stretch>
+            <a:fillRect/>
+          </a:stretch>
+        </p:blipFill>
+        <p:spPr>
+          <a:xfrm>
+            <a:off x="3362632" y="766916"/>
+            <a:ext cx="5397910" cy="5397910"/>
+          </a:xfrm>
+          <a:prstGeom prst="rect">
+            <a:avLst/>
+          </a:prstGeom>
+        </p:spPr>
+      </p:pic>
       <p:sp>
         <p:nvSpPr>
           <p:cNvPr id="2" name="Text 0"/>
@@ -10351,7 +10390,7 @@
               <a:buAutoNum type="arabicPeriod"/>
             </a:pPr>
             <a:r>
-              <a:rPr lang="en-AU" sz="2400"/>
+              <a:rPr lang="en-AU" sz="2400" dirty="0"/>
               <a:t>Do you identify with the standards required to ensure that quality objectives are met?</a:t>
             </a:r>
           </a:p>
@@ -10384,7 +10423,7 @@
           </a:prstGeom>
           <a:extLst>
             <a:ext uri="{C572A759-6A51-4108-AA02-DFA0A04FC94B}">
-              <ma14:wrappingTextBoxFlag xmlns="" xmlns:ma14="http://schemas.microsoft.com/office/mac/drawingml/2011/main" val="0"/>
+              <ma14:wrappingTextBoxFlag xmlns:ma14="http://schemas.microsoft.com/office/mac/drawingml/2011/main" xmlns="" val="0"/>
             </a:ext>
           </a:extLst>
         </p:spPr>
@@ -10614,7 +10653,7 @@
           </a:prstGeom>
           <a:extLst>
             <a:ext uri="{C572A759-6A51-4108-AA02-DFA0A04FC94B}">
-              <ma14:wrappingTextBoxFlag xmlns="" xmlns:ma14="http://schemas.microsoft.com/office/mac/drawingml/2011/main" val="0"/>
+              <ma14:wrappingTextBoxFlag xmlns:ma14="http://schemas.microsoft.com/office/mac/drawingml/2011/main" xmlns="" val="0"/>
             </a:ext>
           </a:extLst>
         </p:spPr>
@@ -10977,7 +11016,7 @@
           </a:prstGeom>
           <a:extLst>
             <a:ext uri="{C572A759-6A51-4108-AA02-DFA0A04FC94B}">
-              <ma14:wrappingTextBoxFlag xmlns="" xmlns:ma14="http://schemas.microsoft.com/office/mac/drawingml/2011/main" val="0"/>
+              <ma14:wrappingTextBoxFlag xmlns:ma14="http://schemas.microsoft.com/office/mac/drawingml/2011/main" xmlns="" val="0"/>
             </a:ext>
           </a:extLst>
         </p:spPr>
@@ -11145,7 +11184,7 @@
           </a:prstGeom>
           <a:extLst>
             <a:ext uri="{C572A759-6A51-4108-AA02-DFA0A04FC94B}">
-              <ma14:wrappingTextBoxFlag xmlns="" xmlns:ma14="http://schemas.microsoft.com/office/mac/drawingml/2011/main" val="0"/>
+              <ma14:wrappingTextBoxFlag xmlns:ma14="http://schemas.microsoft.com/office/mac/drawingml/2011/main" xmlns="" val="0"/>
             </a:ext>
           </a:extLst>
         </p:spPr>
@@ -12168,7 +12207,44 @@
             </a:br>
             <a:r>
               <a:rPr lang="en-AU" dirty="0"/>
-              <a:t>This plan provides a formal framework for ensuring quality throughout the new website project. It has two components </a:t>
+              <a:t>This plan provides a formal framework for ensuring quality throughout the new website project. </a:t>
+            </a:r>
+          </a:p>
+          <a:p>
+            <a:pPr>
+              <a:spcAft>
+                <a:spcPts val="800"/>
+              </a:spcAft>
+              <a:buSzPct val="100000"/>
+            </a:pPr>
+            <a:endParaRPr lang="en-AU" dirty="0"/>
+          </a:p>
+          <a:p>
+            <a:pPr marL="285750" indent="-285750">
+              <a:spcAft>
+                <a:spcPts val="800"/>
+              </a:spcAft>
+              <a:buSzPct val="100000"/>
+              <a:buFontTx/>
+              <a:buChar char="-"/>
+            </a:pPr>
+            <a:r>
+              <a:rPr lang="en-AU" dirty="0"/>
+              <a:t>Quality assurance (QA)</a:t>
+            </a:r>
+          </a:p>
+          <a:p>
+            <a:pPr marL="285750" indent="-285750">
+              <a:spcAft>
+                <a:spcPts val="800"/>
+              </a:spcAft>
+              <a:buSzPct val="100000"/>
+              <a:buFontTx/>
+              <a:buChar char="-"/>
+            </a:pPr>
+            <a:r>
+              <a:rPr lang="en-AU" dirty="0"/>
+              <a:t>Quality control (QC)</a:t>
             </a:r>
           </a:p>
           <a:p>
@@ -12213,7 +12289,7 @@
           </a:prstGeom>
           <a:extLst>
             <a:ext uri="{C572A759-6A51-4108-AA02-DFA0A04FC94B}">
-              <ma14:wrappingTextBoxFlag xmlns="" xmlns:ma14="http://schemas.microsoft.com/office/mac/drawingml/2011/main" val="0"/>
+              <ma14:wrappingTextBoxFlag xmlns:ma14="http://schemas.microsoft.com/office/mac/drawingml/2011/main" xmlns="" val="0"/>
             </a:ext>
           </a:extLst>
         </p:spPr>
@@ -12445,7 +12521,7 @@
           </a:prstGeom>
           <a:extLst>
             <a:ext uri="{C572A759-6A51-4108-AA02-DFA0A04FC94B}">
-              <ma14:wrappingTextBoxFlag xmlns:ma14="http://schemas.microsoft.com/office/mac/drawingml/2011/main" xmlns="" val="0"/>
+              <ma14:wrappingTextBoxFlag xmlns="" xmlns:ma14="http://schemas.microsoft.com/office/mac/drawingml/2011/main" val="0"/>
             </a:ext>
           </a:extLst>
         </p:spPr>
@@ -12683,7 +12759,7 @@
           </a:prstGeom>
           <a:extLst>
             <a:ext uri="{C572A759-6A51-4108-AA02-DFA0A04FC94B}">
-              <ma14:wrappingTextBoxFlag xmlns="" xmlns:ma14="http://schemas.microsoft.com/office/mac/drawingml/2011/main" val="0"/>
+              <ma14:wrappingTextBoxFlag xmlns:ma14="http://schemas.microsoft.com/office/mac/drawingml/2011/main" xmlns="" val="0"/>
             </a:ext>
           </a:extLst>
         </p:spPr>
@@ -12922,7 +12998,7 @@
           </a:prstGeom>
           <a:extLst>
             <a:ext uri="{C572A759-6A51-4108-AA02-DFA0A04FC94B}">
-              <ma14:wrappingTextBoxFlag xmlns:ma14="http://schemas.microsoft.com/office/mac/drawingml/2011/main" xmlns="" val="0"/>
+              <ma14:wrappingTextBoxFlag xmlns="" xmlns:ma14="http://schemas.microsoft.com/office/mac/drawingml/2011/main" val="0"/>
             </a:ext>
           </a:extLst>
         </p:spPr>
@@ -13196,6 +13272,89 @@
           <a:chExt cx="0" cy="0"/>
         </a:xfrm>
       </p:grpSpPr>
+      <p:sp>
+        <p:nvSpPr>
+          <p:cNvPr id="3" name="TextBox 2">
+            <a:extLst>
+              <a:ext uri="{FF2B5EF4-FFF2-40B4-BE49-F238E27FC236}">
+                <a16:creationId xmlns:a16="http://schemas.microsoft.com/office/drawing/2014/main" id="{74774704-7670-8DBE-EAD5-0DFE46755A3B}"/>
+              </a:ext>
+            </a:extLst>
+          </p:cNvPr>
+          <p:cNvSpPr txBox="1"/>
+          <p:nvPr/>
+        </p:nvSpPr>
+        <p:spPr>
+          <a:xfrm>
+            <a:off x="730292" y="2444482"/>
+            <a:ext cx="9271819" cy="1477328"/>
+          </a:xfrm>
+          <a:prstGeom prst="rect">
+            <a:avLst/>
+          </a:prstGeom>
+          <a:noFill/>
+        </p:spPr>
+        <p:txBody>
+          <a:bodyPr wrap="square">
+            <a:spAutoFit/>
+          </a:bodyPr>
+          <a:lstStyle/>
+          <a:p>
+            <a:pPr marL="342900" indent="-342900">
+              <a:buAutoNum type="arabicPeriod"/>
+            </a:pPr>
+            <a:r>
+              <a:rPr lang="en-AU" b="1" dirty="0">
+                <a:ea typeface="Calibri" panose="020F0502020204030204" pitchFamily="34" charset="0"/>
+                <a:cs typeface="Times New Roman" panose="02020603050405020304" pitchFamily="18" charset="0"/>
+              </a:rPr>
+              <a:t>Quality roles and responsibilities</a:t>
+            </a:r>
+          </a:p>
+          <a:p>
+            <a:pPr marL="342900" indent="-342900">
+              <a:buFontTx/>
+              <a:buAutoNum type="arabicPeriod"/>
+            </a:pPr>
+            <a:r>
+              <a:rPr lang="en-AU" b="1" dirty="0">
+                <a:ea typeface="Calibri" panose="020F0502020204030204" pitchFamily="34" charset="0"/>
+                <a:cs typeface="Times New Roman" panose="02020603050405020304" pitchFamily="18" charset="0"/>
+              </a:rPr>
+              <a:t>Plan for reporting quality control  (identify &amp; corrective action)</a:t>
+            </a:r>
+            <a:endParaRPr lang="en-AU" dirty="0"/>
+          </a:p>
+          <a:p>
+            <a:pPr marL="342900" indent="-342900">
+              <a:buFontTx/>
+              <a:buAutoNum type="arabicPeriod"/>
+            </a:pPr>
+            <a:r>
+              <a:rPr lang="en-AU" dirty="0"/>
+              <a:t> </a:t>
+            </a:r>
+            <a:r>
+              <a:rPr lang="en-AU" b="1" kern="100" dirty="0">
+                <a:ea typeface="Calibri" panose="020F0502020204030204" pitchFamily="34" charset="0"/>
+                <a:cs typeface="Times New Roman" panose="02020603050405020304" pitchFamily="18" charset="0"/>
+              </a:rPr>
+              <a:t>Quality tools</a:t>
+            </a:r>
+            <a:endParaRPr lang="en-AU" dirty="0"/>
+          </a:p>
+          <a:p>
+            <a:endParaRPr lang="en-AU" dirty="0"/>
+          </a:p>
+          <a:p>
+            <a:pPr marL="285750" indent="-285750">
+              <a:buFont typeface="Arial" panose="020B0604020202020204" pitchFamily="34" charset="0"/>
+              <a:buChar char="•"/>
+            </a:pPr>
+            <a:endParaRPr lang="en-AU" dirty="0"/>
+          </a:p>
+        </p:txBody>
+      </p:sp>
       <p:pic>
         <p:nvPicPr>
           <p:cNvPr id="11" name="Picture 10">
@@ -13297,7 +13456,7 @@
           </a:prstGeom>
           <a:extLst>
             <a:ext uri="{C572A759-6A51-4108-AA02-DFA0A04FC94B}">
-              <ma14:wrappingTextBoxFlag xmlns="" xmlns:ma14="http://schemas.microsoft.com/office/mac/drawingml/2011/main" val="0"/>
+              <ma14:wrappingTextBoxFlag xmlns:ma14="http://schemas.microsoft.com/office/mac/drawingml/2011/main" xmlns="" val="0"/>
             </a:ext>
           </a:extLst>
         </p:spPr>
@@ -13603,11 +13762,10 @@
           </a:bodyPr>
           <a:lstStyle/>
           <a:p>
-            <a:pPr marL="0" indent="0" algn="l">
+            <a:pPr>
               <a:spcAft>
                 <a:spcPts val="1400"/>
               </a:spcAft>
-              <a:buNone/>
             </a:pPr>
             <a:r>
               <a:rPr lang="en-US" b="1" dirty="0"/>
@@ -13619,7 +13777,7 @@
                   <a:schemeClr val="tx1"/>
                 </a:solidFill>
               </a:rPr>
-              <a:t>commitment to quality across all IT activities and ICT systems, aligned with Strategic Objective 2</a:t>
+              <a:t>commitment to quality with Strategic Objective 2 across all IT activities and ICT systems, aligned with Strategic Objective 2</a:t>
             </a:r>
             <a:endParaRPr lang="en-US" sz="1800" dirty="0"/>
           </a:p>
@@ -13645,7 +13803,7 @@
           </a:prstGeom>
           <a:extLst>
             <a:ext uri="{C572A759-6A51-4108-AA02-DFA0A04FC94B}">
-              <ma14:wrappingTextBoxFlag xmlns="" xmlns:ma14="http://schemas.microsoft.com/office/mac/drawingml/2011/main" val="0"/>
+              <ma14:wrappingTextBoxFlag xmlns:ma14="http://schemas.microsoft.com/office/mac/drawingml/2011/main" xmlns="" val="0"/>
             </a:ext>
           </a:extLst>
         </p:spPr>
@@ -13854,7 +14012,7 @@
         </p:blipFill>
         <p:spPr>
           <a:xfrm>
-            <a:off x="1689100" y="1404620"/>
+            <a:off x="1838960" y="1666240"/>
             <a:ext cx="4826000" cy="4826000"/>
           </a:xfrm>
           <a:prstGeom prst="rect">
